--- a/generated/Tier 1 Broker Scorecards/Peco Insurance LLC_Broker_Scorecard.pptx
+++ b/generated/Tier 1 Broker Scorecards/Peco Insurance LLC_Broker_Scorecard.pptx
@@ -3357,7 +3357,7 @@
                         <a:rPr sz="800">
                           <a:latin typeface="Segoe UI"/>
                         </a:rPr>
-                        <a:t>$2,449,764.72 / $2,082,255.87 / $351,149.57</a:t>
+                        <a:t>$2,449,764.72 / $2,082,837.39 / $351,731.09</a:t>
                       </a:r>
                     </a:p>
                   </a:txBody>
@@ -3394,7 +3394,7 @@
                         <a:rPr sz="900">
                           <a:latin typeface="Segoe UI"/>
                         </a:rPr>
-                        <a:t>Tier 1  |  12.05% / 15.00%</a:t>
+                        <a:t>Tier 1  |  13.86% / 15.00%</a:t>
                       </a:r>
                     </a:p>
                   </a:txBody>
@@ -3431,7 +3431,7 @@
                         <a:rPr sz="900">
                           <a:latin typeface="Segoe UI"/>
                         </a:rPr>
-                        <a:t>$3,429,670.61  (10.2% achieved)</a:t>
+                        <a:t>$3,429,670.61  (10.3% achieved)</a:t>
                       </a:r>
                     </a:p>
                   </a:txBody>
@@ -3690,7 +3690,7 @@
                         <a:rPr sz="900">
                           <a:latin typeface="Segoe UI"/>
                         </a:rPr>
-                        <a:t>Fleet Bound Premium: $111,168.99</a:t>
+                        <a:t>Fleet Bound Premium: $97,551.47</a:t>
                       </a:r>
                     </a:p>
                   </a:txBody>
@@ -3727,7 +3727,7 @@
                         <a:rPr sz="900">
                           <a:latin typeface="Segoe UI"/>
                         </a:rPr>
-                        <a:t>Fleet Book %: 31.7%</a:t>
+                        <a:t>Fleet Book %: 27.7%</a:t>
                       </a:r>
                     </a:p>
                   </a:txBody>
@@ -3766,7 +3766,7 @@
                         <a:rPr sz="900">
                           <a:latin typeface="Segoe UI"/>
                         </a:rPr>
-                        <a:t>Non-Fleet Subs: 159  |  Binds: 17</a:t>
+                        <a:t>Non-Fleet Subs: 159  |  Binds: 20</a:t>
                       </a:r>
                     </a:p>
                   </a:txBody>
@@ -3803,7 +3803,7 @@
                         <a:rPr sz="900">
                           <a:latin typeface="Segoe UI"/>
                         </a:rPr>
-                        <a:t>Non-Fleet Bound Premium: $239,980.58</a:t>
+                        <a:t>Non-Fleet Bound Premium: $254,179.62</a:t>
                       </a:r>
                     </a:p>
                   </a:txBody>
@@ -3840,7 +3840,7 @@
                         <a:rPr sz="900">
                           <a:latin typeface="Segoe UI"/>
                         </a:rPr>
-                        <a:t>Non-Fleet Book %: 68.3%</a:t>
+                        <a:t>Non-Fleet Book %: 72.3%</a:t>
                       </a:r>
                     </a:p>
                   </a:txBody>
@@ -4428,7 +4428,7 @@
                           </a:solidFill>
                           <a:latin typeface="Segoe UI"/>
                         </a:rPr>
-                        <a:t>13</a:t>
+                        <a:t>14</a:t>
                       </a:r>
                     </a:p>
                   </a:txBody>
@@ -4624,7 +4624,7 @@
                           </a:solidFill>
                           <a:latin typeface="Segoe UI"/>
                         </a:rPr>
-                        <a:t>15.6%</a:t>
+                        <a:t>18.8%</a:t>
                       </a:r>
                     </a:p>
                   </a:txBody>
@@ -4664,7 +4664,7 @@
                         <a:rPr sz="800">
                           <a:latin typeface="Segoe UI"/>
                         </a:rPr>
-                        <a:t>20.4%</a:t>
+                        <a:t>21.2%</a:t>
                       </a:r>
                     </a:p>
                   </a:txBody>
@@ -4707,7 +4707,7 @@
                           </a:solidFill>
                           <a:latin typeface="Segoe UI"/>
                         </a:rPr>
-                        <a:t>23.1%</a:t>
+                        <a:t>28.6%</a:t>
                       </a:r>
                     </a:p>
                   </a:txBody>
@@ -4747,7 +4747,7 @@
                         <a:rPr sz="800">
                           <a:latin typeface="Segoe UI"/>
                         </a:rPr>
-                        <a:t>22.0%</a:t>
+                        <a:t>21.3%</a:t>
                       </a:r>
                     </a:p>
                   </a:txBody>
@@ -4906,7 +4906,7 @@
                           </a:solidFill>
                           <a:latin typeface="Segoe UI"/>
                         </a:rPr>
-                        <a:t>5</a:t>
+                        <a:t>6</a:t>
                       </a:r>
                     </a:p>
                   </a:txBody>
@@ -4943,7 +4943,7 @@
                         <a:rPr sz="800">
                           <a:latin typeface="Segoe UI"/>
                         </a:rPr>
-                        <a:t>28</a:t>
+                        <a:t>29</a:t>
                       </a:r>
                     </a:p>
                   </a:txBody>
@@ -4983,7 +4983,7 @@
                           </a:solidFill>
                           <a:latin typeface="Segoe UI"/>
                         </a:rPr>
-                        <a:t>3</a:t>
+                        <a:t>4</a:t>
                       </a:r>
                     </a:p>
                   </a:txBody>
@@ -5020,7 +5020,7 @@
                         <a:rPr sz="800">
                           <a:latin typeface="Segoe UI"/>
                         </a:rPr>
-                        <a:t>28</a:t>
+                        <a:t>27</a:t>
                       </a:r>
                     </a:p>
                   </a:txBody>
@@ -5256,10 +5256,13 @@
                     <a:p>
                       <a:pPr algn="ctr"/>
                       <a:r>
-                        <a:rPr sz="800">
+                        <a:rPr sz="800" b="1">
+                          <a:solidFill>
+                            <a:srgbClr val="DC2626"/>
+                          </a:solidFill>
                           <a:latin typeface="Segoe UI"/>
                         </a:rPr>
-                        <a:t/>
+                        <a:t>$401</a:t>
                       </a:r>
                     </a:p>
                   </a:txBody>

--- a/generated/Tier 1 Broker Scorecards/Peco Insurance LLC_Broker_Scorecard.pptx
+++ b/generated/Tier 1 Broker Scorecards/Peco Insurance LLC_Broker_Scorecard.pptx
@@ -3394,7 +3394,7 @@
                         <a:rPr sz="900">
                           <a:latin typeface="Segoe UI"/>
                         </a:rPr>
-                        <a:t>Tier 1  |  13.86% / 15.00%</a:t>
+                        <a:t>Tier 1  |  13.25% / 15.00%</a:t>
                       </a:r>
                     </a:p>
                   </a:txBody>
@@ -3653,7 +3653,7 @@
                         <a:rPr sz="900">
                           <a:latin typeface="Segoe UI"/>
                         </a:rPr>
-                        <a:t>Fleet Subs: 7  |  Binds: 3</a:t>
+                        <a:t>Fleet Subs: 6  |  Binds: 2</a:t>
                       </a:r>
                     </a:p>
                   </a:txBody>
@@ -3690,7 +3690,7 @@
                         <a:rPr sz="900">
                           <a:latin typeface="Segoe UI"/>
                         </a:rPr>
-                        <a:t>Fleet Bound Premium: $97,551.47</a:t>
+                        <a:t>Fleet Bound Premium: $79,412.80</a:t>
                       </a:r>
                     </a:p>
                   </a:txBody>
@@ -3727,7 +3727,7 @@
                         <a:rPr sz="900">
                           <a:latin typeface="Segoe UI"/>
                         </a:rPr>
-                        <a:t>Fleet Book %: 27.7%</a:t>
+                        <a:t>Fleet Book %: 22.6%</a:t>
                       </a:r>
                     </a:p>
                   </a:txBody>
@@ -3766,7 +3766,7 @@
                         <a:rPr sz="900">
                           <a:latin typeface="Segoe UI"/>
                         </a:rPr>
-                        <a:t>Non-Fleet Subs: 159  |  Binds: 20</a:t>
+                        <a:t>Non-Fleet Subs: 160  |  Binds: 20</a:t>
                       </a:r>
                     </a:p>
                   </a:txBody>
@@ -3803,7 +3803,7 @@
                         <a:rPr sz="900">
                           <a:latin typeface="Segoe UI"/>
                         </a:rPr>
-                        <a:t>Non-Fleet Bound Premium: $254,179.62</a:t>
+                        <a:t>Non-Fleet Bound Premium: $272,318.29</a:t>
                       </a:r>
                     </a:p>
                   </a:txBody>
@@ -3840,7 +3840,7 @@
                         <a:rPr sz="900">
                           <a:latin typeface="Segoe UI"/>
                         </a:rPr>
-                        <a:t>Non-Fleet Book %: 72.3%</a:t>
+                        <a:t>Non-Fleet Book %: 77.4%</a:t>
                       </a:r>
                     </a:p>
                   </a:txBody>
@@ -4624,7 +4624,7 @@
                           </a:solidFill>
                           <a:latin typeface="Segoe UI"/>
                         </a:rPr>
-                        <a:t>18.8%</a:t>
+                        <a:t>21.9%</a:t>
                       </a:r>
                     </a:p>
                   </a:txBody>
@@ -4664,7 +4664,7 @@
                         <a:rPr sz="800">
                           <a:latin typeface="Segoe UI"/>
                         </a:rPr>
-                        <a:t>21.2%</a:t>
+                        <a:t>20.4%</a:t>
                       </a:r>
                     </a:p>
                   </a:txBody>
@@ -4906,7 +4906,7 @@
                           </a:solidFill>
                           <a:latin typeface="Segoe UI"/>
                         </a:rPr>
-                        <a:t>6</a:t>
+                        <a:t>7</a:t>
                       </a:r>
                     </a:p>
                   </a:txBody>
@@ -4943,7 +4943,7 @@
                         <a:rPr sz="800">
                           <a:latin typeface="Segoe UI"/>
                         </a:rPr>
-                        <a:t>29</a:t>
+                        <a:t>28</a:t>
                       </a:r>
                     </a:p>
                   </a:txBody>

--- a/generated/Tier 1 Broker Scorecards/Peco Insurance LLC_Broker_Scorecard.pptx
+++ b/generated/Tier 1 Broker Scorecards/Peco Insurance LLC_Broker_Scorecard.pptx
@@ -3357,7 +3357,7 @@
                         <a:rPr sz="800">
                           <a:latin typeface="Segoe UI"/>
                         </a:rPr>
-                        <a:t>$2,449,764.72 / $2,082,837.39 / $351,731.09</a:t>
+                        <a:t>$2,449,764.72 / $2,082,928.31 / $351,822.01</a:t>
                       </a:r>
                     </a:p>
                   </a:txBody>
@@ -3394,7 +3394,7 @@
                         <a:rPr sz="900">
                           <a:latin typeface="Segoe UI"/>
                         </a:rPr>
-                        <a:t>Tier 1  |  13.25% / 15.00%</a:t>
+                        <a:t>Tier 1  |  13.77% / 15.00%</a:t>
                       </a:r>
                     </a:p>
                   </a:txBody>
@@ -3690,7 +3690,7 @@
                         <a:rPr sz="900">
                           <a:latin typeface="Segoe UI"/>
                         </a:rPr>
-                        <a:t>Fleet Bound Premium: $79,412.80</a:t>
+                        <a:t>Fleet Bound Premium: $83,248.73</a:t>
                       </a:r>
                     </a:p>
                   </a:txBody>
@@ -3727,7 +3727,7 @@
                         <a:rPr sz="900">
                           <a:latin typeface="Segoe UI"/>
                         </a:rPr>
-                        <a:t>Fleet Book %: 22.6%</a:t>
+                        <a:t>Fleet Book %: 23.7%</a:t>
                       </a:r>
                     </a:p>
                   </a:txBody>
@@ -3766,7 +3766,7 @@
                         <a:rPr sz="900">
                           <a:latin typeface="Segoe UI"/>
                         </a:rPr>
-                        <a:t>Non-Fleet Subs: 160  |  Binds: 20</a:t>
+                        <a:t>Non-Fleet Subs: 161  |  Binds: 21</a:t>
                       </a:r>
                     </a:p>
                   </a:txBody>
@@ -3803,7 +3803,7 @@
                         <a:rPr sz="900">
                           <a:latin typeface="Segoe UI"/>
                         </a:rPr>
-                        <a:t>Non-Fleet Bound Premium: $272,318.29</a:t>
+                        <a:t>Non-Fleet Bound Premium: $268,573.28</a:t>
                       </a:r>
                     </a:p>
                   </a:txBody>
@@ -3840,7 +3840,7 @@
                         <a:rPr sz="900">
                           <a:latin typeface="Segoe UI"/>
                         </a:rPr>
-                        <a:t>Non-Fleet Book %: 77.4%</a:t>
+                        <a:t>Non-Fleet Book %: 76.3%</a:t>
                       </a:r>
                     </a:p>
                   </a:txBody>
@@ -4428,7 +4428,7 @@
                           </a:solidFill>
                           <a:latin typeface="Segoe UI"/>
                         </a:rPr>
-                        <a:t>14</a:t>
+                        <a:t>16</a:t>
                       </a:r>
                     </a:p>
                   </a:txBody>
@@ -4707,7 +4707,7 @@
                           </a:solidFill>
                           <a:latin typeface="Segoe UI"/>
                         </a:rPr>
-                        <a:t>28.6%</a:t>
+                        <a:t>31.2%</a:t>
                       </a:r>
                     </a:p>
                   </a:txBody>
@@ -4983,7 +4983,7 @@
                           </a:solidFill>
                           <a:latin typeface="Segoe UI"/>
                         </a:rPr>
-                        <a:t>4</a:t>
+                        <a:t>5</a:t>
                       </a:r>
                     </a:p>
                   </a:txBody>
@@ -5262,7 +5262,7 @@
                           </a:solidFill>
                           <a:latin typeface="Segoe UI"/>
                         </a:rPr>
-                        <a:t>$401</a:t>
+                        <a:t>$492</a:t>
                       </a:r>
                     </a:p>
                   </a:txBody>

--- a/generated/Tier 1 Broker Scorecards/Peco Insurance LLC_Broker_Scorecard.pptx
+++ b/generated/Tier 1 Broker Scorecards/Peco Insurance LLC_Broker_Scorecard.pptx
@@ -3357,7 +3357,7 @@
                         <a:rPr sz="800">
                           <a:latin typeface="Segoe UI"/>
                         </a:rPr>
-                        <a:t>$2,449,764.72 / $2,082,928.31 / $351,822.01</a:t>
+                        <a:t>$2,449,764.72 / $2,082,619.76 / $351,513.46</a:t>
                       </a:r>
                     </a:p>
                   </a:txBody>
@@ -3394,7 +3394,7 @@
                         <a:rPr sz="900">
                           <a:latin typeface="Segoe UI"/>
                         </a:rPr>
-                        <a:t>Tier 1  |  13.77% / 15.00%</a:t>
+                        <a:t>Tier 1  |  12.50% / 15.00%</a:t>
                       </a:r>
                     </a:p>
                   </a:txBody>
@@ -3431,7 +3431,7 @@
                         <a:rPr sz="900">
                           <a:latin typeface="Segoe UI"/>
                         </a:rPr>
-                        <a:t>$3,429,670.61  (10.3% achieved)</a:t>
+                        <a:t>$3,429,670.61  (10.2% achieved)</a:t>
                       </a:r>
                     </a:p>
                   </a:txBody>
@@ -3690,7 +3690,7 @@
                         <a:rPr sz="900">
                           <a:latin typeface="Segoe UI"/>
                         </a:rPr>
-                        <a:t>Fleet Bound Premium: $83,248.73</a:t>
+                        <a:t>Fleet Bound Premium: $86,093.67</a:t>
                       </a:r>
                     </a:p>
                   </a:txBody>
@@ -3727,7 +3727,7 @@
                         <a:rPr sz="900">
                           <a:latin typeface="Segoe UI"/>
                         </a:rPr>
-                        <a:t>Fleet Book %: 23.7%</a:t>
+                        <a:t>Fleet Book %: 24.5%</a:t>
                       </a:r>
                     </a:p>
                   </a:txBody>
@@ -3766,7 +3766,7 @@
                         <a:rPr sz="900">
                           <a:latin typeface="Segoe UI"/>
                         </a:rPr>
-                        <a:t>Non-Fleet Subs: 161  |  Binds: 21</a:t>
+                        <a:t>Non-Fleet Subs: 162  |  Binds: 19</a:t>
                       </a:r>
                     </a:p>
                   </a:txBody>
@@ -3803,7 +3803,7 @@
                         <a:rPr sz="900">
                           <a:latin typeface="Segoe UI"/>
                         </a:rPr>
-                        <a:t>Non-Fleet Bound Premium: $268,573.28</a:t>
+                        <a:t>Non-Fleet Bound Premium: $265,419.79</a:t>
                       </a:r>
                     </a:p>
                   </a:txBody>
@@ -3840,7 +3840,7 @@
                         <a:rPr sz="900">
                           <a:latin typeface="Segoe UI"/>
                         </a:rPr>
-                        <a:t>Non-Fleet Book %: 76.3%</a:t>
+                        <a:t>Non-Fleet Book %: 75.5%</a:t>
                       </a:r>
                     </a:p>
                   </a:txBody>
@@ -4428,7 +4428,7 @@
                           </a:solidFill>
                           <a:latin typeface="Segoe UI"/>
                         </a:rPr>
-                        <a:t>16</a:t>
+                        <a:t>17</a:t>
                       </a:r>
                     </a:p>
                   </a:txBody>
@@ -4664,7 +4664,7 @@
                         <a:rPr sz="800">
                           <a:latin typeface="Segoe UI"/>
                         </a:rPr>
-                        <a:t>20.4%</a:t>
+                        <a:t>21.2%</a:t>
                       </a:r>
                     </a:p>
                   </a:txBody>
@@ -4707,7 +4707,7 @@
                           </a:solidFill>
                           <a:latin typeface="Segoe UI"/>
                         </a:rPr>
-                        <a:t>31.2%</a:t>
+                        <a:t>23.5%</a:t>
                       </a:r>
                     </a:p>
                   </a:txBody>
@@ -4943,7 +4943,7 @@
                         <a:rPr sz="800">
                           <a:latin typeface="Segoe UI"/>
                         </a:rPr>
-                        <a:t>28</a:t>
+                        <a:t>29</a:t>
                       </a:r>
                     </a:p>
                   </a:txBody>
@@ -4983,7 +4983,7 @@
                           </a:solidFill>
                           <a:latin typeface="Segoe UI"/>
                         </a:rPr>
-                        <a:t>5</a:t>
+                        <a:t>4</a:t>
                       </a:r>
                     </a:p>
                   </a:txBody>
@@ -5262,7 +5262,7 @@
                           </a:solidFill>
                           <a:latin typeface="Segoe UI"/>
                         </a:rPr>
-                        <a:t>$492</a:t>
+                        <a:t>$183</a:t>
                       </a:r>
                     </a:p>
                   </a:txBody>

--- a/generated/Tier 1 Broker Scorecards/Peco Insurance LLC_Broker_Scorecard.pptx
+++ b/generated/Tier 1 Broker Scorecards/Peco Insurance LLC_Broker_Scorecard.pptx
@@ -3394,7 +3394,7 @@
                         <a:rPr sz="900">
                           <a:latin typeface="Segoe UI"/>
                         </a:rPr>
-                        <a:t>Tier 1  |  12.50% / 15.00%</a:t>
+                        <a:t>Tier 1  |  11.90% / 15.00%</a:t>
                       </a:r>
                     </a:p>
                   </a:txBody>
@@ -3690,7 +3690,7 @@
                         <a:rPr sz="900">
                           <a:latin typeface="Segoe UI"/>
                         </a:rPr>
-                        <a:t>Fleet Bound Premium: $86,093.67</a:t>
+                        <a:t>Fleet Bound Premium: $82,016.78</a:t>
                       </a:r>
                     </a:p>
                   </a:txBody>
@@ -3727,7 +3727,7 @@
                         <a:rPr sz="900">
                           <a:latin typeface="Segoe UI"/>
                         </a:rPr>
-                        <a:t>Fleet Book %: 24.5%</a:t>
+                        <a:t>Fleet Book %: 23.3%</a:t>
                       </a:r>
                     </a:p>
                   </a:txBody>
@@ -3766,7 +3766,7 @@
                         <a:rPr sz="900">
                           <a:latin typeface="Segoe UI"/>
                         </a:rPr>
-                        <a:t>Non-Fleet Subs: 162  |  Binds: 19</a:t>
+                        <a:t>Non-Fleet Subs: 162  |  Binds: 18</a:t>
                       </a:r>
                     </a:p>
                   </a:txBody>
@@ -3803,7 +3803,7 @@
                         <a:rPr sz="900">
                           <a:latin typeface="Segoe UI"/>
                         </a:rPr>
-                        <a:t>Non-Fleet Bound Premium: $265,419.79</a:t>
+                        <a:t>Non-Fleet Bound Premium: $269,496.68</a:t>
                       </a:r>
                     </a:p>
                   </a:txBody>
@@ -3840,7 +3840,7 @@
                         <a:rPr sz="900">
                           <a:latin typeface="Segoe UI"/>
                         </a:rPr>
-                        <a:t>Non-Fleet Book %: 75.5%</a:t>
+                        <a:t>Non-Fleet Book %: 76.7%</a:t>
                       </a:r>
                     </a:p>
                   </a:txBody>
@@ -4428,7 +4428,7 @@
                           </a:solidFill>
                           <a:latin typeface="Segoe UI"/>
                         </a:rPr>
-                        <a:t>17</a:t>
+                        <a:t>18</a:t>
                       </a:r>
                     </a:p>
                   </a:txBody>
@@ -4624,7 +4624,7 @@
                           </a:solidFill>
                           <a:latin typeface="Segoe UI"/>
                         </a:rPr>
-                        <a:t>21.9%</a:t>
+                        <a:t>18.8%</a:t>
                       </a:r>
                     </a:p>
                   </a:txBody>
@@ -4664,7 +4664,7 @@
                         <a:rPr sz="800">
                           <a:latin typeface="Segoe UI"/>
                         </a:rPr>
-                        <a:t>21.2%</a:t>
+                        <a:t>20.4%</a:t>
                       </a:r>
                     </a:p>
                   </a:txBody>
@@ -4707,7 +4707,7 @@
                           </a:solidFill>
                           <a:latin typeface="Segoe UI"/>
                         </a:rPr>
-                        <a:t>23.5%</a:t>
+                        <a:t>22.2%</a:t>
                       </a:r>
                     </a:p>
                   </a:txBody>
@@ -4906,7 +4906,7 @@
                           </a:solidFill>
                           <a:latin typeface="Segoe UI"/>
                         </a:rPr>
-                        <a:t>7</a:t>
+                        <a:t>6</a:t>
                       </a:r>
                     </a:p>
                   </a:txBody>
@@ -4943,7 +4943,7 @@
                         <a:rPr sz="800">
                           <a:latin typeface="Segoe UI"/>
                         </a:rPr>
-                        <a:t>29</a:t>
+                        <a:t>28</a:t>
                       </a:r>
                     </a:p>
                   </a:txBody>

--- a/generated/Tier 1 Broker Scorecards/Peco Insurance LLC_Broker_Scorecard.pptx
+++ b/generated/Tier 1 Broker Scorecards/Peco Insurance LLC_Broker_Scorecard.pptx
@@ -3394,7 +3394,7 @@
                         <a:rPr sz="900">
                           <a:latin typeface="Segoe UI"/>
                         </a:rPr>
-                        <a:t>Tier 1  |  11.90% / 15.00%</a:t>
+                        <a:t>Tier 1  |  11.31% / 15.00%</a:t>
                       </a:r>
                     </a:p>
                   </a:txBody>
@@ -3653,7 +3653,7 @@
                         <a:rPr sz="900">
                           <a:latin typeface="Segoe UI"/>
                         </a:rPr>
-                        <a:t>Fleet Subs: 6  |  Binds: 2</a:t>
+                        <a:t>Fleet Subs: 7  |  Binds: 3</a:t>
                       </a:r>
                     </a:p>
                   </a:txBody>
@@ -3690,7 +3690,7 @@
                         <a:rPr sz="900">
                           <a:latin typeface="Segoe UI"/>
                         </a:rPr>
-                        <a:t>Fleet Bound Premium: $82,016.78</a:t>
+                        <a:t>Fleet Bound Premium: $118,106.49</a:t>
                       </a:r>
                     </a:p>
                   </a:txBody>
@@ -3727,7 +3727,7 @@
                         <a:rPr sz="900">
                           <a:latin typeface="Segoe UI"/>
                         </a:rPr>
-                        <a:t>Fleet Book %: 23.3%</a:t>
+                        <a:t>Fleet Book %: 33.6%</a:t>
                       </a:r>
                     </a:p>
                   </a:txBody>
@@ -3766,7 +3766,7 @@
                         <a:rPr sz="900">
                           <a:latin typeface="Segoe UI"/>
                         </a:rPr>
-                        <a:t>Non-Fleet Subs: 162  |  Binds: 18</a:t>
+                        <a:t>Non-Fleet Subs: 161  |  Binds: 16</a:t>
                       </a:r>
                     </a:p>
                   </a:txBody>
@@ -3803,7 +3803,7 @@
                         <a:rPr sz="900">
                           <a:latin typeface="Segoe UI"/>
                         </a:rPr>
-                        <a:t>Non-Fleet Bound Premium: $269,496.68</a:t>
+                        <a:t>Non-Fleet Bound Premium: $233,406.97</a:t>
                       </a:r>
                     </a:p>
                   </a:txBody>
@@ -3840,7 +3840,7 @@
                         <a:rPr sz="900">
                           <a:latin typeface="Segoe UI"/>
                         </a:rPr>
-                        <a:t>Non-Fleet Book %: 76.7%</a:t>
+                        <a:t>Non-Fleet Book %: 66.4%</a:t>
                       </a:r>
                     </a:p>
                   </a:txBody>

--- a/generated/Tier 1 Broker Scorecards/Peco Insurance LLC_Broker_Scorecard.pptx
+++ b/generated/Tier 1 Broker Scorecards/Peco Insurance LLC_Broker_Scorecard.pptx
@@ -3394,7 +3394,7 @@
                         <a:rPr sz="900">
                           <a:latin typeface="Segoe UI"/>
                         </a:rPr>
-                        <a:t>Tier 1  |  11.31% / 15.00%</a:t>
+                        <a:t>Tier 1  |  12.50% / 15.00%</a:t>
                       </a:r>
                     </a:p>
                   </a:txBody>
@@ -3690,7 +3690,7 @@
                         <a:rPr sz="900">
                           <a:latin typeface="Segoe UI"/>
                         </a:rPr>
-                        <a:t>Fleet Bound Premium: $118,106.49</a:t>
+                        <a:t>Fleet Bound Premium: $111,281.46</a:t>
                       </a:r>
                     </a:p>
                   </a:txBody>
@@ -3727,7 +3727,7 @@
                         <a:rPr sz="900">
                           <a:latin typeface="Segoe UI"/>
                         </a:rPr>
-                        <a:t>Fleet Book %: 33.6%</a:t>
+                        <a:t>Fleet Book %: 31.7%</a:t>
                       </a:r>
                     </a:p>
                   </a:txBody>
@@ -3766,7 +3766,7 @@
                         <a:rPr sz="900">
                           <a:latin typeface="Segoe UI"/>
                         </a:rPr>
-                        <a:t>Non-Fleet Subs: 161  |  Binds: 16</a:t>
+                        <a:t>Non-Fleet Subs: 161  |  Binds: 18</a:t>
                       </a:r>
                     </a:p>
                   </a:txBody>
@@ -3803,7 +3803,7 @@
                         <a:rPr sz="900">
                           <a:latin typeface="Segoe UI"/>
                         </a:rPr>
-                        <a:t>Non-Fleet Bound Premium: $233,406.97</a:t>
+                        <a:t>Non-Fleet Bound Premium: $240,232.00</a:t>
                       </a:r>
                     </a:p>
                   </a:txBody>
@@ -3840,7 +3840,7 @@
                         <a:rPr sz="900">
                           <a:latin typeface="Segoe UI"/>
                         </a:rPr>
-                        <a:t>Non-Fleet Book %: 66.4%</a:t>
+                        <a:t>Non-Fleet Book %: 68.3%</a:t>
                       </a:r>
                     </a:p>
                   </a:txBody>
@@ -4624,7 +4624,7 @@
                           </a:solidFill>
                           <a:latin typeface="Segoe UI"/>
                         </a:rPr>
-                        <a:t>18.8%</a:t>
+                        <a:t>21.9%</a:t>
                       </a:r>
                     </a:p>
                   </a:txBody>
@@ -4664,7 +4664,7 @@
                         <a:rPr sz="800">
                           <a:latin typeface="Segoe UI"/>
                         </a:rPr>
-                        <a:t>20.4%</a:t>
+                        <a:t>21.2%</a:t>
                       </a:r>
                     </a:p>
                   </a:txBody>
@@ -4906,7 +4906,7 @@
                           </a:solidFill>
                           <a:latin typeface="Segoe UI"/>
                         </a:rPr>
-                        <a:t>6</a:t>
+                        <a:t>7</a:t>
                       </a:r>
                     </a:p>
                   </a:txBody>
@@ -4943,7 +4943,7 @@
                         <a:rPr sz="800">
                           <a:latin typeface="Segoe UI"/>
                         </a:rPr>
-                        <a:t>28</a:t>
+                        <a:t>29</a:t>
                       </a:r>
                     </a:p>
                   </a:txBody>

--- a/generated/Tier 1 Broker Scorecards/Peco Insurance LLC_Broker_Scorecard.pptx
+++ b/generated/Tier 1 Broker Scorecards/Peco Insurance LLC_Broker_Scorecard.pptx
@@ -3357,7 +3357,7 @@
                         <a:rPr sz="800">
                           <a:latin typeface="Segoe UI"/>
                         </a:rPr>
-                        <a:t>$2,449,764.72 / $2,082,619.76 / $351,513.46</a:t>
+                        <a:t>$2,449,764.72 / $2,082,338.95 / $351,232.65</a:t>
                       </a:r>
                     </a:p>
                   </a:txBody>
@@ -3394,7 +3394,7 @@
                         <a:rPr sz="900">
                           <a:latin typeface="Segoe UI"/>
                         </a:rPr>
-                        <a:t>Tier 1  |  12.50% / 15.00%</a:t>
+                        <a:t>Tier 1  |  11.90% / 15.00%</a:t>
                       </a:r>
                     </a:p>
                   </a:txBody>
@@ -3653,7 +3653,7 @@
                         <a:rPr sz="900">
                           <a:latin typeface="Segoe UI"/>
                         </a:rPr>
-                        <a:t>Fleet Subs: 7  |  Binds: 3</a:t>
+                        <a:t>Fleet Subs: 6  |  Binds: 2</a:t>
                       </a:r>
                     </a:p>
                   </a:txBody>
@@ -3690,7 +3690,7 @@
                         <a:rPr sz="900">
                           <a:latin typeface="Segoe UI"/>
                         </a:rPr>
-                        <a:t>Fleet Bound Premium: $111,281.46</a:t>
+                        <a:t>Fleet Bound Premium: $91,883.95</a:t>
                       </a:r>
                     </a:p>
                   </a:txBody>
@@ -3727,7 +3727,7 @@
                         <a:rPr sz="900">
                           <a:latin typeface="Segoe UI"/>
                         </a:rPr>
-                        <a:t>Fleet Book %: 31.7%</a:t>
+                        <a:t>Fleet Book %: 26.2%</a:t>
                       </a:r>
                     </a:p>
                   </a:txBody>
@@ -3766,7 +3766,7 @@
                         <a:rPr sz="900">
                           <a:latin typeface="Segoe UI"/>
                         </a:rPr>
-                        <a:t>Non-Fleet Subs: 161  |  Binds: 18</a:t>
+                        <a:t>Non-Fleet Subs: 162  |  Binds: 18</a:t>
                       </a:r>
                     </a:p>
                   </a:txBody>
@@ -3803,7 +3803,7 @@
                         <a:rPr sz="900">
                           <a:latin typeface="Segoe UI"/>
                         </a:rPr>
-                        <a:t>Non-Fleet Bound Premium: $240,232.00</a:t>
+                        <a:t>Non-Fleet Bound Premium: $259,348.70</a:t>
                       </a:r>
                     </a:p>
                   </a:txBody>
@@ -3840,7 +3840,7 @@
                         <a:rPr sz="900">
                           <a:latin typeface="Segoe UI"/>
                         </a:rPr>
-                        <a:t>Non-Fleet Book %: 68.3%</a:t>
+                        <a:t>Non-Fleet Book %: 73.8%</a:t>
                       </a:r>
                     </a:p>
                   </a:txBody>
@@ -4351,7 +4351,7 @@
                           </a:solidFill>
                           <a:latin typeface="Segoe UI"/>
                         </a:rPr>
-                        <a:t>32</a:t>
+                        <a:t>31</a:t>
                       </a:r>
                     </a:p>
                   </a:txBody>
@@ -4428,7 +4428,7 @@
                           </a:solidFill>
                           <a:latin typeface="Segoe UI"/>
                         </a:rPr>
-                        <a:t>18</a:t>
+                        <a:t>19</a:t>
                       </a:r>
                     </a:p>
                   </a:txBody>
@@ -4624,7 +4624,7 @@
                           </a:solidFill>
                           <a:latin typeface="Segoe UI"/>
                         </a:rPr>
-                        <a:t>21.9%</a:t>
+                        <a:t>16.1%</a:t>
                       </a:r>
                     </a:p>
                   </a:txBody>
@@ -4703,11 +4703,11 @@
                       <a:r>
                         <a:rPr sz="800">
                           <a:solidFill>
-                            <a:srgbClr val="059669"/>
+                            <a:srgbClr val="DC2626"/>
                           </a:solidFill>
                           <a:latin typeface="Segoe UI"/>
                         </a:rPr>
-                        <a:t>22.2%</a:t>
+                        <a:t>21.1%</a:t>
                       </a:r>
                     </a:p>
                   </a:txBody>
@@ -4906,7 +4906,7 @@
                           </a:solidFill>
                           <a:latin typeface="Segoe UI"/>
                         </a:rPr>
-                        <a:t>7</a:t>
+                        <a:t>5</a:t>
                       </a:r>
                     </a:p>
                   </a:txBody>
@@ -5256,13 +5256,10 @@
                     <a:p>
                       <a:pPr algn="ctr"/>
                       <a:r>
-                        <a:rPr sz="800" b="1">
-                          <a:solidFill>
-                            <a:srgbClr val="DC2626"/>
-                          </a:solidFill>
+                        <a:rPr sz="800">
                           <a:latin typeface="Segoe UI"/>
                         </a:rPr>
-                        <a:t>$183</a:t>
+                        <a:t/>
                       </a:r>
                     </a:p>
                   </a:txBody>

--- a/generated/Tier 1 Broker Scorecards/Peco Insurance LLC_Broker_Scorecard.pptx
+++ b/generated/Tier 1 Broker Scorecards/Peco Insurance LLC_Broker_Scorecard.pptx
@@ -3394,7 +3394,7 @@
                         <a:rPr sz="900">
                           <a:latin typeface="Segoe UI"/>
                         </a:rPr>
-                        <a:t>Tier 1  |  11.90% / 15.00%</a:t>
+                        <a:t>Tier 1  |  11.31% / 15.00%</a:t>
                       </a:r>
                     </a:p>
                   </a:txBody>
@@ -3690,7 +3690,7 @@
                         <a:rPr sz="900">
                           <a:latin typeface="Segoe UI"/>
                         </a:rPr>
-                        <a:t>Fleet Bound Premium: $91,883.95</a:t>
+                        <a:t>Fleet Bound Premium: $95,304.40</a:t>
                       </a:r>
                     </a:p>
                   </a:txBody>
@@ -3727,7 +3727,7 @@
                         <a:rPr sz="900">
                           <a:latin typeface="Segoe UI"/>
                         </a:rPr>
-                        <a:t>Fleet Book %: 26.2%</a:t>
+                        <a:t>Fleet Book %: 27.1%</a:t>
                       </a:r>
                     </a:p>
                   </a:txBody>
@@ -3766,7 +3766,7 @@
                         <a:rPr sz="900">
                           <a:latin typeface="Segoe UI"/>
                         </a:rPr>
-                        <a:t>Non-Fleet Subs: 162  |  Binds: 18</a:t>
+                        <a:t>Non-Fleet Subs: 162  |  Binds: 17</a:t>
                       </a:r>
                     </a:p>
                   </a:txBody>
@@ -3803,7 +3803,7 @@
                         <a:rPr sz="900">
                           <a:latin typeface="Segoe UI"/>
                         </a:rPr>
-                        <a:t>Non-Fleet Bound Premium: $259,348.70</a:t>
+                        <a:t>Non-Fleet Bound Premium: $255,928.25</a:t>
                       </a:r>
                     </a:p>
                   </a:txBody>
@@ -3840,7 +3840,7 @@
                         <a:rPr sz="900">
                           <a:latin typeface="Segoe UI"/>
                         </a:rPr>
-                        <a:t>Non-Fleet Book %: 73.8%</a:t>
+                        <a:t>Non-Fleet Book %: 72.9%</a:t>
                       </a:r>
                     </a:p>
                   </a:txBody>
@@ -4747,7 +4747,7 @@
                         <a:rPr sz="800">
                           <a:latin typeface="Segoe UI"/>
                         </a:rPr>
-                        <a:t>21.3%</a:t>
+                        <a:t>20.5%</a:t>
                       </a:r>
                     </a:p>
                   </a:txBody>
@@ -5020,7 +5020,7 @@
                         <a:rPr sz="800">
                           <a:latin typeface="Segoe UI"/>
                         </a:rPr>
-                        <a:t>27</a:t>
+                        <a:t>26</a:t>
                       </a:r>
                     </a:p>
                   </a:txBody>

--- a/generated/Tier 1 Broker Scorecards/Peco Insurance LLC_Broker_Scorecard.pptx
+++ b/generated/Tier 1 Broker Scorecards/Peco Insurance LLC_Broker_Scorecard.pptx
@@ -3394,7 +3394,7 @@
                         <a:rPr sz="900">
                           <a:latin typeface="Segoe UI"/>
                         </a:rPr>
-                        <a:t>Tier 1  |  11.31% / 15.00%</a:t>
+                        <a:t>Tier 1  |  11.90% / 15.00%</a:t>
                       </a:r>
                     </a:p>
                   </a:txBody>
@@ -3690,7 +3690,7 @@
                         <a:rPr sz="900">
                           <a:latin typeface="Segoe UI"/>
                         </a:rPr>
-                        <a:t>Fleet Bound Premium: $95,304.40</a:t>
+                        <a:t>Fleet Bound Premium: $93,480.15</a:t>
                       </a:r>
                     </a:p>
                   </a:txBody>
@@ -3727,7 +3727,7 @@
                         <a:rPr sz="900">
                           <a:latin typeface="Segoe UI"/>
                         </a:rPr>
-                        <a:t>Fleet Book %: 27.1%</a:t>
+                        <a:t>Fleet Book %: 26.6%</a:t>
                       </a:r>
                     </a:p>
                   </a:txBody>
@@ -3766,7 +3766,7 @@
                         <a:rPr sz="900">
                           <a:latin typeface="Segoe UI"/>
                         </a:rPr>
-                        <a:t>Non-Fleet Subs: 162  |  Binds: 17</a:t>
+                        <a:t>Non-Fleet Subs: 162  |  Binds: 18</a:t>
                       </a:r>
                     </a:p>
                   </a:txBody>
@@ -3803,7 +3803,7 @@
                         <a:rPr sz="900">
                           <a:latin typeface="Segoe UI"/>
                         </a:rPr>
-                        <a:t>Non-Fleet Bound Premium: $255,928.25</a:t>
+                        <a:t>Non-Fleet Bound Premium: $257,752.50</a:t>
                       </a:r>
                     </a:p>
                   </a:txBody>
@@ -3840,7 +3840,7 @@
                         <a:rPr sz="900">
                           <a:latin typeface="Segoe UI"/>
                         </a:rPr>
-                        <a:t>Non-Fleet Book %: 72.9%</a:t>
+                        <a:t>Non-Fleet Book %: 73.4%</a:t>
                       </a:r>
                     </a:p>
                   </a:txBody>
@@ -4624,7 +4624,7 @@
                           </a:solidFill>
                           <a:latin typeface="Segoe UI"/>
                         </a:rPr>
-                        <a:t>16.1%</a:t>
+                        <a:t>19.4%</a:t>
                       </a:r>
                     </a:p>
                   </a:txBody>
@@ -4747,7 +4747,7 @@
                         <a:rPr sz="800">
                           <a:latin typeface="Segoe UI"/>
                         </a:rPr>
-                        <a:t>20.5%</a:t>
+                        <a:t>22.0%</a:t>
                       </a:r>
                     </a:p>
                   </a:txBody>
@@ -4906,7 +4906,7 @@
                           </a:solidFill>
                           <a:latin typeface="Segoe UI"/>
                         </a:rPr>
-                        <a:t>5</a:t>
+                        <a:t>6</a:t>
                       </a:r>
                     </a:p>
                   </a:txBody>
@@ -5020,7 +5020,7 @@
                         <a:rPr sz="800">
                           <a:latin typeface="Segoe UI"/>
                         </a:rPr>
-                        <a:t>26</a:t>
+                        <a:t>28</a:t>
                       </a:r>
                     </a:p>
                   </a:txBody>

--- a/generated/Tier 1 Broker Scorecards/Peco Insurance LLC_Broker_Scorecard.pptx
+++ b/generated/Tier 1 Broker Scorecards/Peco Insurance LLC_Broker_Scorecard.pptx
@@ -3394,7 +3394,7 @@
                         <a:rPr sz="900">
                           <a:latin typeface="Segoe UI"/>
                         </a:rPr>
-                        <a:t>Tier 1  |  11.90% / 15.00%</a:t>
+                        <a:t>Tier 1  |  11.83% / 15.00%</a:t>
                       </a:r>
                     </a:p>
                   </a:txBody>
@@ -3690,7 +3690,7 @@
                         <a:rPr sz="900">
                           <a:latin typeface="Segoe UI"/>
                         </a:rPr>
-                        <a:t>Fleet Bound Premium: $93,480.15</a:t>
+                        <a:t>Fleet Bound Premium: $87,689.39</a:t>
                       </a:r>
                     </a:p>
                   </a:txBody>
@@ -3727,7 +3727,7 @@
                         <a:rPr sz="900">
                           <a:latin typeface="Segoe UI"/>
                         </a:rPr>
-                        <a:t>Fleet Book %: 26.6%</a:t>
+                        <a:t>Fleet Book %: 25.0%</a:t>
                       </a:r>
                     </a:p>
                   </a:txBody>
@@ -3766,7 +3766,7 @@
                         <a:rPr sz="900">
                           <a:latin typeface="Segoe UI"/>
                         </a:rPr>
-                        <a:t>Non-Fleet Subs: 162  |  Binds: 18</a:t>
+                        <a:t>Non-Fleet Subs: 163  |  Binds: 18</a:t>
                       </a:r>
                     </a:p>
                   </a:txBody>
@@ -3803,7 +3803,7 @@
                         <a:rPr sz="900">
                           <a:latin typeface="Segoe UI"/>
                         </a:rPr>
-                        <a:t>Non-Fleet Bound Premium: $257,752.50</a:t>
+                        <a:t>Non-Fleet Bound Premium: $263,543.26</a:t>
                       </a:r>
                     </a:p>
                   </a:txBody>
@@ -3840,7 +3840,7 @@
                         <a:rPr sz="900">
                           <a:latin typeface="Segoe UI"/>
                         </a:rPr>
-                        <a:t>Non-Fleet Book %: 73.4%</a:t>
+                        <a:t>Non-Fleet Book %: 75.0%</a:t>
                       </a:r>
                     </a:p>
                   </a:txBody>
@@ -4428,7 +4428,7 @@
                           </a:solidFill>
                           <a:latin typeface="Segoe UI"/>
                         </a:rPr>
-                        <a:t>19</a:t>
+                        <a:t>20</a:t>
                       </a:r>
                     </a:p>
                   </a:txBody>
@@ -4624,7 +4624,7 @@
                           </a:solidFill>
                           <a:latin typeface="Segoe UI"/>
                         </a:rPr>
-                        <a:t>19.4%</a:t>
+                        <a:t>16.1%</a:t>
                       </a:r>
                     </a:p>
                   </a:txBody>
@@ -4664,7 +4664,7 @@
                         <a:rPr sz="800">
                           <a:latin typeface="Segoe UI"/>
                         </a:rPr>
-                        <a:t>21.2%</a:t>
+                        <a:t>20.4%</a:t>
                       </a:r>
                     </a:p>
                   </a:txBody>
@@ -4707,7 +4707,7 @@
                           </a:solidFill>
                           <a:latin typeface="Segoe UI"/>
                         </a:rPr>
-                        <a:t>21.1%</a:t>
+                        <a:t>20.0%</a:t>
                       </a:r>
                     </a:p>
                   </a:txBody>
@@ -4747,7 +4747,7 @@
                         <a:rPr sz="800">
                           <a:latin typeface="Segoe UI"/>
                         </a:rPr>
-                        <a:t>22.0%</a:t>
+                        <a:t>20.5%</a:t>
                       </a:r>
                     </a:p>
                   </a:txBody>
@@ -4906,7 +4906,7 @@
                           </a:solidFill>
                           <a:latin typeface="Segoe UI"/>
                         </a:rPr>
-                        <a:t>6</a:t>
+                        <a:t>5</a:t>
                       </a:r>
                     </a:p>
                   </a:txBody>
@@ -4943,7 +4943,7 @@
                         <a:rPr sz="800">
                           <a:latin typeface="Segoe UI"/>
                         </a:rPr>
-                        <a:t>29</a:t>
+                        <a:t>28</a:t>
                       </a:r>
                     </a:p>
                   </a:txBody>
@@ -5020,7 +5020,7 @@
                         <a:rPr sz="800">
                           <a:latin typeface="Segoe UI"/>
                         </a:rPr>
-                        <a:t>28</a:t>
+                        <a:t>26</a:t>
                       </a:r>
                     </a:p>
                   </a:txBody>

--- a/generated/Tier 1 Broker Scorecards/Peco Insurance LLC_Broker_Scorecard.pptx
+++ b/generated/Tier 1 Broker Scorecards/Peco Insurance LLC_Broker_Scorecard.pptx
@@ -3394,7 +3394,7 @@
                         <a:rPr sz="900">
                           <a:latin typeface="Segoe UI"/>
                         </a:rPr>
-                        <a:t>Tier 1  |  11.83% / 15.00%</a:t>
+                        <a:t>Tier 1  |  11.24% / 15.00%</a:t>
                       </a:r>
                     </a:p>
                   </a:txBody>
@@ -3690,7 +3690,7 @@
                         <a:rPr sz="900">
                           <a:latin typeface="Segoe UI"/>
                         </a:rPr>
-                        <a:t>Fleet Bound Premium: $87,689.39</a:t>
+                        <a:t>Fleet Bound Premium: $96,261.82</a:t>
                       </a:r>
                     </a:p>
                   </a:txBody>
@@ -3727,7 +3727,7 @@
                         <a:rPr sz="900">
                           <a:latin typeface="Segoe UI"/>
                         </a:rPr>
-                        <a:t>Fleet Book %: 25.0%</a:t>
+                        <a:t>Fleet Book %: 27.4%</a:t>
                       </a:r>
                     </a:p>
                   </a:txBody>
@@ -3766,7 +3766,7 @@
                         <a:rPr sz="900">
                           <a:latin typeface="Segoe UI"/>
                         </a:rPr>
-                        <a:t>Non-Fleet Subs: 163  |  Binds: 18</a:t>
+                        <a:t>Non-Fleet Subs: 163  |  Binds: 17</a:t>
                       </a:r>
                     </a:p>
                   </a:txBody>
@@ -3803,7 +3803,7 @@
                         <a:rPr sz="900">
                           <a:latin typeface="Segoe UI"/>
                         </a:rPr>
-                        <a:t>Non-Fleet Bound Premium: $263,543.26</a:t>
+                        <a:t>Non-Fleet Bound Premium: $254,970.83</a:t>
                       </a:r>
                     </a:p>
                   </a:txBody>
@@ -3840,7 +3840,7 @@
                         <a:rPr sz="900">
                           <a:latin typeface="Segoe UI"/>
                         </a:rPr>
-                        <a:t>Non-Fleet Book %: 75.0%</a:t>
+                        <a:t>Non-Fleet Book %: 72.6%</a:t>
                       </a:r>
                     </a:p>
                   </a:txBody>
@@ -4664,7 +4664,7 @@
                         <a:rPr sz="800">
                           <a:latin typeface="Segoe UI"/>
                         </a:rPr>
-                        <a:t>20.4%</a:t>
+                        <a:t>21.2%</a:t>
                       </a:r>
                     </a:p>
                   </a:txBody>
@@ -4747,7 +4747,7 @@
                         <a:rPr sz="800">
                           <a:latin typeface="Segoe UI"/>
                         </a:rPr>
-                        <a:t>20.5%</a:t>
+                        <a:t>22.0%</a:t>
                       </a:r>
                     </a:p>
                   </a:txBody>
@@ -4943,7 +4943,7 @@
                         <a:rPr sz="800">
                           <a:latin typeface="Segoe UI"/>
                         </a:rPr>
-                        <a:t>28</a:t>
+                        <a:t>29</a:t>
                       </a:r>
                     </a:p>
                   </a:txBody>
@@ -5020,7 +5020,7 @@
                         <a:rPr sz="800">
                           <a:latin typeface="Segoe UI"/>
                         </a:rPr>
-                        <a:t>26</a:t>
+                        <a:t>28</a:t>
                       </a:r>
                     </a:p>
                   </a:txBody>

--- a/generated/Tier 1 Broker Scorecards/Peco Insurance LLC_Broker_Scorecard.pptx
+++ b/generated/Tier 1 Broker Scorecards/Peco Insurance LLC_Broker_Scorecard.pptx
@@ -3357,7 +3357,7 @@
                         <a:rPr sz="800">
                           <a:latin typeface="Segoe UI"/>
                         </a:rPr>
-                        <a:t>$2,449,764.72 / $2,082,338.95 / $351,232.65</a:t>
+                        <a:t>$2,449,764.72 / $1,967,700.58 / $351,232.65</a:t>
                       </a:r>
                     </a:p>
                   </a:txBody>
@@ -3394,7 +3394,7 @@
                         <a:rPr sz="900">
                           <a:latin typeface="Segoe UI"/>
                         </a:rPr>
-                        <a:t>Tier 1  |  11.24% / 15.00%</a:t>
+                        <a:t>Tier 1  |  12.35% / 15.00%</a:t>
                       </a:r>
                     </a:p>
                   </a:txBody>
@@ -3690,7 +3690,7 @@
                         <a:rPr sz="900">
                           <a:latin typeface="Segoe UI"/>
                         </a:rPr>
-                        <a:t>Fleet Bound Premium: $96,261.82</a:t>
+                        <a:t>Fleet Bound Premium: $90,187.14</a:t>
                       </a:r>
                     </a:p>
                   </a:txBody>
@@ -3727,7 +3727,7 @@
                         <a:rPr sz="900">
                           <a:latin typeface="Segoe UI"/>
                         </a:rPr>
-                        <a:t>Fleet Book %: 27.4%</a:t>
+                        <a:t>Fleet Book %: 25.7%</a:t>
                       </a:r>
                     </a:p>
                   </a:txBody>
@@ -3766,7 +3766,7 @@
                         <a:rPr sz="900">
                           <a:latin typeface="Segoe UI"/>
                         </a:rPr>
-                        <a:t>Non-Fleet Subs: 163  |  Binds: 17</a:t>
+                        <a:t>Non-Fleet Subs: 164  |  Binds: 19</a:t>
                       </a:r>
                     </a:p>
                   </a:txBody>
@@ -3803,7 +3803,7 @@
                         <a:rPr sz="900">
                           <a:latin typeface="Segoe UI"/>
                         </a:rPr>
-                        <a:t>Non-Fleet Bound Premium: $254,970.83</a:t>
+                        <a:t>Non-Fleet Bound Premium: $261,045.51</a:t>
                       </a:r>
                     </a:p>
                   </a:txBody>
@@ -3840,7 +3840,7 @@
                         <a:rPr sz="900">
                           <a:latin typeface="Segoe UI"/>
                         </a:rPr>
-                        <a:t>Non-Fleet Book %: 72.6%</a:t>
+                        <a:t>Non-Fleet Book %: 74.3%</a:t>
                       </a:r>
                     </a:p>
                   </a:txBody>
@@ -4428,7 +4428,7 @@
                           </a:solidFill>
                           <a:latin typeface="Segoe UI"/>
                         </a:rPr>
-                        <a:t>20</a:t>
+                        <a:t>21</a:t>
                       </a:r>
                     </a:p>
                   </a:txBody>
@@ -4500,9 +4500,12 @@
                       <a:pPr algn="ctr"/>
                       <a:r>
                         <a:rPr sz="800">
+                          <a:solidFill>
+                            <a:srgbClr val="DC2626"/>
+                          </a:solidFill>
                           <a:latin typeface="Segoe UI"/>
                         </a:rPr>
-                        <a:t/>
+                        <a:t>1</a:t>
                       </a:r>
                     </a:p>
                   </a:txBody>
@@ -4624,7 +4627,7 @@
                           </a:solidFill>
                           <a:latin typeface="Segoe UI"/>
                         </a:rPr>
-                        <a:t>16.1%</a:t>
+                        <a:t>19.4%</a:t>
                       </a:r>
                     </a:p>
                   </a:txBody>
@@ -4707,7 +4710,7 @@
                           </a:solidFill>
                           <a:latin typeface="Segoe UI"/>
                         </a:rPr>
-                        <a:t>20.0%</a:t>
+                        <a:t>19.0%</a:t>
                       </a:r>
                     </a:p>
                   </a:txBody>
@@ -4747,7 +4750,7 @@
                         <a:rPr sz="800">
                           <a:latin typeface="Segoe UI"/>
                         </a:rPr>
-                        <a:t>22.0%</a:t>
+                        <a:t>21.3%</a:t>
                       </a:r>
                     </a:p>
                   </a:txBody>
@@ -4906,7 +4909,7 @@
                           </a:solidFill>
                           <a:latin typeface="Segoe UI"/>
                         </a:rPr>
-                        <a:t>5</a:t>
+                        <a:t>6</a:t>
                       </a:r>
                     </a:p>
                   </a:txBody>
@@ -5020,7 +5023,7 @@
                         <a:rPr sz="800">
                           <a:latin typeface="Segoe UI"/>
                         </a:rPr>
-                        <a:t>28</a:t>
+                        <a:t>27</a:t>
                       </a:r>
                     </a:p>
                   </a:txBody>
